--- a/week9_python4/week9_python4.pptx
+++ b/week9_python4/week9_python4.pptx
@@ -3966,7 +3966,7 @@
         <p:spPr>
           <a:xfrm>
             <a:off x="1636285" y="1250762"/>
-            <a:ext cx="5497018" cy="2677656"/>
+            <a:ext cx="6219972" cy="2677656"/>
           </a:xfrm>
           <a:prstGeom prst="rect">
             <a:avLst/>
@@ -4020,7 +4020,7 @@
                 <a:latin typeface="Helvetica Light" panose="020B0403020202020204" pitchFamily="34" charset="0"/>
                 <a:cs typeface="Courier New" panose="02070309020205020404" pitchFamily="49" charset="0"/>
               </a:rPr>
-              <a:t>Regular Expressions</a:t>
+              <a:t>Regular Expressions (re functions)</a:t>
             </a:r>
           </a:p>
           <a:p>
@@ -9647,7 +9647,7 @@
                 <a:latin typeface="Courier New" panose="02070309020205020404" pitchFamily="49" charset="0"/>
                 <a:cs typeface="Courier New" panose="02070309020205020404" pitchFamily="49" charset="0"/>
               </a:rPr>
-              <a:t>[1], 'r')</a:t>
+              <a:t>[1], 'r’) # or hardcode in file name</a:t>
             </a:r>
           </a:p>
           <a:p>
@@ -10195,7 +10195,7 @@
         <p:spPr>
           <a:xfrm>
             <a:off x="457200" y="942881"/>
-            <a:ext cx="11661228" cy="5509200"/>
+            <a:ext cx="11661228" cy="5170646"/>
           </a:xfrm>
           <a:prstGeom prst="rect">
             <a:avLst/>
@@ -10278,7 +10278,7 @@
                 <a:latin typeface="Courier New" panose="02070309020205020404" pitchFamily="49" charset="0"/>
                 <a:cs typeface="Courier New" panose="02070309020205020404" pitchFamily="49" charset="0"/>
               </a:rPr>
-              <a:t>', 'w')</a:t>
+              <a:t>', 'w’)</a:t>
             </a:r>
           </a:p>
           <a:p>
@@ -10288,6 +10288,15 @@
             </a:endParaRPr>
           </a:p>
           <a:p>
+            <a:endParaRPr lang="en-US" sz="2200" b="1" dirty="0">
+              <a:solidFill>
+                <a:srgbClr val="FF0000"/>
+              </a:solidFill>
+              <a:latin typeface="Courier New" panose="02070309020205020404" pitchFamily="49" charset="0"/>
+              <a:cs typeface="Courier New" panose="02070309020205020404" pitchFamily="49" charset="0"/>
+            </a:endParaRPr>
+          </a:p>
+          <a:p>
             <a:r>
               <a:rPr lang="en-US" sz="2200" b="1" dirty="0" err="1">
                 <a:solidFill>
@@ -10296,26 +10305,15 @@
                 <a:latin typeface="Courier New" panose="02070309020205020404" pitchFamily="49" charset="0"/>
                 <a:cs typeface="Courier New" panose="02070309020205020404" pitchFamily="49" charset="0"/>
               </a:rPr>
-              <a:t>Nlist</a:t>
+              <a:t>TotalC</a:t>
             </a:r>
             <a:r>
               <a:rPr lang="en-US" sz="2200" b="1" dirty="0">
                 <a:latin typeface="Courier New" panose="02070309020205020404" pitchFamily="49" charset="0"/>
                 <a:cs typeface="Courier New" panose="02070309020205020404" pitchFamily="49" charset="0"/>
               </a:rPr>
-              <a:t>=[] # initializing </a:t>
-            </a:r>
-            <a:r>
-              <a:rPr lang="en-US" sz="2200" b="1" dirty="0" err="1">
-                <a:latin typeface="Courier New" panose="02070309020205020404" pitchFamily="49" charset="0"/>
-                <a:cs typeface="Courier New" panose="02070309020205020404" pitchFamily="49" charset="0"/>
-              </a:rPr>
-              <a:t>Nlist</a:t>
-            </a:r>
-            <a:endParaRPr lang="en-US" sz="2200" b="1" dirty="0">
-              <a:latin typeface="Courier New" panose="02070309020205020404" pitchFamily="49" charset="0"/>
-              <a:cs typeface="Courier New" panose="02070309020205020404" pitchFamily="49" charset="0"/>
-            </a:endParaRPr>
+              <a:t>=0</a:t>
+            </a:r>
           </a:p>
           <a:p>
             <a:r>
@@ -10326,7 +10324,7 @@
                 <a:latin typeface="Courier New" panose="02070309020205020404" pitchFamily="49" charset="0"/>
                 <a:cs typeface="Courier New" panose="02070309020205020404" pitchFamily="49" charset="0"/>
               </a:rPr>
-              <a:t>TotalC</a:t>
+              <a:t>TotalG</a:t>
             </a:r>
             <a:r>
               <a:rPr lang="en-US" sz="2200" b="1" dirty="0">
@@ -10345,7 +10343,7 @@
                 <a:latin typeface="Courier New" panose="02070309020205020404" pitchFamily="49" charset="0"/>
                 <a:cs typeface="Courier New" panose="02070309020205020404" pitchFamily="49" charset="0"/>
               </a:rPr>
-              <a:t>TotalG</a:t>
+              <a:t>CumLength</a:t>
             </a:r>
             <a:r>
               <a:rPr lang="en-US" sz="2200" b="1" dirty="0">
@@ -10364,52 +10362,14 @@
                 <a:latin typeface="Courier New" panose="02070309020205020404" pitchFamily="49" charset="0"/>
                 <a:cs typeface="Courier New" panose="02070309020205020404" pitchFamily="49" charset="0"/>
               </a:rPr>
-              <a:t>CumLength</a:t>
+              <a:t>LineNumber</a:t>
             </a:r>
             <a:r>
               <a:rPr lang="en-US" sz="2200" b="1" dirty="0">
                 <a:latin typeface="Courier New" panose="02070309020205020404" pitchFamily="49" charset="0"/>
                 <a:cs typeface="Courier New" panose="02070309020205020404" pitchFamily="49" charset="0"/>
               </a:rPr>
-              <a:t>=0</a:t>
-            </a:r>
-          </a:p>
-          <a:p>
-            <a:r>
-              <a:rPr lang="en-US" sz="2200" b="1" dirty="0" err="1">
-                <a:solidFill>
-                  <a:srgbClr val="FF0000"/>
-                </a:solidFill>
-                <a:latin typeface="Courier New" panose="02070309020205020404" pitchFamily="49" charset="0"/>
-                <a:cs typeface="Courier New" panose="02070309020205020404" pitchFamily="49" charset="0"/>
-              </a:rPr>
-              <a:t>LineNumber</a:t>
-            </a:r>
-            <a:r>
-              <a:rPr lang="en-US" sz="2200" b="1" dirty="0">
-                <a:latin typeface="Courier New" panose="02070309020205020404" pitchFamily="49" charset="0"/>
-                <a:cs typeface="Courier New" panose="02070309020205020404" pitchFamily="49" charset="0"/>
-              </a:rPr>
               <a:t> = 0  ## setting to 0 to count line numbers while looping through the file. </a:t>
-            </a:r>
-          </a:p>
-          <a:p>
-            <a:r>
-              <a:rPr lang="en-US" sz="2200" b="1" dirty="0" err="1">
-                <a:solidFill>
-                  <a:srgbClr val="FF0000"/>
-                </a:solidFill>
-                <a:latin typeface="Courier New" panose="02070309020205020404" pitchFamily="49" charset="0"/>
-                <a:cs typeface="Courier New" panose="02070309020205020404" pitchFamily="49" charset="0"/>
-              </a:rPr>
-              <a:t>CumLength</a:t>
-            </a:r>
-            <a:r>
-              <a:rPr lang="en-US" sz="2200" b="1" dirty="0">
-                <a:latin typeface="Courier New" panose="02070309020205020404" pitchFamily="49" charset="0"/>
-                <a:cs typeface="Courier New" panose="02070309020205020404" pitchFamily="49" charset="0"/>
-              </a:rPr>
-              <a:t> = 0 # initializing cum length</a:t>
             </a:r>
           </a:p>
           <a:p>
@@ -10517,7 +10477,7 @@
         <p:spPr>
           <a:xfrm>
             <a:off x="163285" y="746938"/>
-            <a:ext cx="12148458" cy="5647700"/>
+            <a:ext cx="12148458" cy="5355312"/>
           </a:xfrm>
           <a:prstGeom prst="rect">
             <a:avLst/>
@@ -10600,6 +10560,10 @@
               </a:rPr>
               <a:t># matches ID line</a:t>
             </a:r>
+            <a:endParaRPr lang="en-US" sz="1900" b="1" dirty="0">
+              <a:latin typeface="Courier New" panose="02070309020205020404" pitchFamily="49" charset="0"/>
+              <a:cs typeface="Courier New" panose="02070309020205020404" pitchFamily="49" charset="0"/>
+            </a:endParaRPr>
           </a:p>
           <a:p>
             <a:r>
@@ -10607,67 +10571,78 @@
                 <a:latin typeface="Courier New" panose="02070309020205020404" pitchFamily="49" charset="0"/>
                 <a:cs typeface="Courier New" panose="02070309020205020404" pitchFamily="49" charset="0"/>
               </a:rPr>
-              <a:t>		ID = Line</a:t>
-            </a:r>
-          </a:p>
-          <a:p>
+              <a:t>		</a:t>
+            </a:r>
+            <a:r>
+              <a:rPr lang="en-US" sz="1900" b="1" dirty="0" err="1">
+                <a:latin typeface="Courier New" panose="02070309020205020404" pitchFamily="49" charset="0"/>
+                <a:cs typeface="Courier New" panose="02070309020205020404" pitchFamily="49" charset="0"/>
+              </a:rPr>
+              <a:t>OUT.write</a:t>
+            </a:r>
             <a:r>
               <a:rPr lang="en-US" sz="1900" b="1" dirty="0">
                 <a:latin typeface="Courier New" panose="02070309020205020404" pitchFamily="49" charset="0"/>
                 <a:cs typeface="Courier New" panose="02070309020205020404" pitchFamily="49" charset="0"/>
               </a:rPr>
-              <a:t>		</a:t>
+              <a:t>("%s, " %(Line))</a:t>
+            </a:r>
+          </a:p>
+          <a:p>
+            <a:r>
+              <a:rPr lang="en-US" sz="1900" b="1" dirty="0">
+                <a:latin typeface="Courier New" panose="02070309020205020404" pitchFamily="49" charset="0"/>
+                <a:cs typeface="Courier New" panose="02070309020205020404" pitchFamily="49" charset="0"/>
+              </a:rPr>
+              <a:t>	</a:t>
             </a:r>
             <a:r>
               <a:rPr lang="en-US" sz="1900" b="1" dirty="0" err="1">
                 <a:latin typeface="Courier New" panose="02070309020205020404" pitchFamily="49" charset="0"/>
                 <a:cs typeface="Courier New" panose="02070309020205020404" pitchFamily="49" charset="0"/>
               </a:rPr>
-              <a:t>OUT.write</a:t>
+              <a:t>elif</a:t>
             </a:r>
             <a:r>
               <a:rPr lang="en-US" sz="1900" b="1" dirty="0">
                 <a:latin typeface="Courier New" panose="02070309020205020404" pitchFamily="49" charset="0"/>
                 <a:cs typeface="Courier New" panose="02070309020205020404" pitchFamily="49" charset="0"/>
               </a:rPr>
-              <a:t>("%s, " %(ID))</a:t>
-            </a:r>
-          </a:p>
-          <a:p>
+              <a:t> </a:t>
+            </a:r>
+            <a:r>
+              <a:rPr lang="en-US" sz="1900" b="1" dirty="0" err="1">
+                <a:latin typeface="Courier New" panose="02070309020205020404" pitchFamily="49" charset="0"/>
+                <a:cs typeface="Courier New" panose="02070309020205020404" pitchFamily="49" charset="0"/>
+              </a:rPr>
+              <a:t>re.search</a:t>
+            </a:r>
             <a:r>
               <a:rPr lang="en-US" sz="1900" b="1" dirty="0">
                 <a:latin typeface="Courier New" panose="02070309020205020404" pitchFamily="49" charset="0"/>
                 <a:cs typeface="Courier New" panose="02070309020205020404" pitchFamily="49" charset="0"/>
               </a:rPr>
-              <a:t>	</a:t>
-            </a:r>
-            <a:r>
-              <a:rPr lang="en-US" sz="1900" b="1" dirty="0" err="1">
-                <a:latin typeface="Courier New" panose="02070309020205020404" pitchFamily="49" charset="0"/>
-                <a:cs typeface="Courier New" panose="02070309020205020404" pitchFamily="49" charset="0"/>
-              </a:rPr>
-              <a:t>elif</a:t>
-            </a:r>
-            <a:r>
-              <a:rPr lang="en-US" sz="1900" b="1" dirty="0">
-                <a:latin typeface="Courier New" panose="02070309020205020404" pitchFamily="49" charset="0"/>
-                <a:cs typeface="Courier New" panose="02070309020205020404" pitchFamily="49" charset="0"/>
-              </a:rPr>
-              <a:t> </a:t>
-            </a:r>
-            <a:r>
-              <a:rPr lang="en-US" sz="1900" b="1" dirty="0" err="1">
-                <a:latin typeface="Courier New" panose="02070309020205020404" pitchFamily="49" charset="0"/>
-                <a:cs typeface="Courier New" panose="02070309020205020404" pitchFamily="49" charset="0"/>
-              </a:rPr>
-              <a:t>re.search</a:t>
-            </a:r>
-            <a:r>
-              <a:rPr lang="en-US" sz="1900" b="1" dirty="0">
-                <a:latin typeface="Courier New" panose="02070309020205020404" pitchFamily="49" charset="0"/>
-                <a:cs typeface="Courier New" panose="02070309020205020404" pitchFamily="49" charset="0"/>
-              </a:rPr>
-              <a:t>("[ATCG]", Line):		</a:t>
+              <a:t>("^[ATCGN]", </a:t>
+            </a:r>
+            <a:r>
+              <a:rPr lang="en-US" sz="1900" b="1">
+                <a:latin typeface="Courier New" panose="02070309020205020404" pitchFamily="49" charset="0"/>
+                <a:cs typeface="Courier New" panose="02070309020205020404" pitchFamily="49" charset="0"/>
+              </a:rPr>
+              <a:t>Line):</a:t>
+            </a:r>
+            <a:r>
+              <a:rPr lang="en-US" sz="1900" b="1">
+                <a:solidFill>
+                  <a:schemeClr val="tx1">
+                    <a:lumMod val="50000"/>
+                    <a:lumOff val="50000"/>
+                  </a:schemeClr>
+                </a:solidFill>
+                <a:latin typeface="Courier New" panose="02070309020205020404" pitchFamily="49" charset="0"/>
+                <a:cs typeface="Courier New" panose="02070309020205020404" pitchFamily="49" charset="0"/>
+              </a:rPr>
+              <a:t># </a:t>
             </a:r>
             <a:r>
               <a:rPr lang="en-US" sz="1900" b="1" dirty="0">
@@ -10680,7 +10655,20 @@
                 <a:latin typeface="Courier New" panose="02070309020205020404" pitchFamily="49" charset="0"/>
                 <a:cs typeface="Courier New" panose="02070309020205020404" pitchFamily="49" charset="0"/>
               </a:rPr>
-              <a:t> # matches DNA sequence</a:t>
+              <a:t>matches </a:t>
+            </a:r>
+            <a:r>
+              <a:rPr lang="en-US" sz="1900" b="1">
+                <a:solidFill>
+                  <a:schemeClr val="tx1">
+                    <a:lumMod val="50000"/>
+                    <a:lumOff val="50000"/>
+                  </a:schemeClr>
+                </a:solidFill>
+                <a:latin typeface="Courier New" panose="02070309020205020404" pitchFamily="49" charset="0"/>
+                <a:cs typeface="Courier New" panose="02070309020205020404" pitchFamily="49" charset="0"/>
+              </a:rPr>
+              <a:t>if starts with A, T, C, G, or N</a:t>
             </a:r>
             <a:endParaRPr lang="en-US" sz="1900" b="1" dirty="0">
               <a:latin typeface="Courier New" panose="02070309020205020404" pitchFamily="49" charset="0"/>

--- a/week9_python4/week9_python4.pptx
+++ b/week9_python4/week9_python4.pptx
@@ -19,10 +19,10 @@
     <p:sldId id="338" r:id="rId10"/>
     <p:sldId id="337" r:id="rId11"/>
     <p:sldId id="339" r:id="rId12"/>
-    <p:sldId id="344" r:id="rId13"/>
-    <p:sldId id="349" r:id="rId14"/>
-    <p:sldId id="345" r:id="rId15"/>
-    <p:sldId id="346" r:id="rId16"/>
+    <p:sldId id="346" r:id="rId13"/>
+    <p:sldId id="344" r:id="rId14"/>
+    <p:sldId id="349" r:id="rId15"/>
+    <p:sldId id="345" r:id="rId16"/>
     <p:sldId id="350" r:id="rId17"/>
     <p:sldId id="352" r:id="rId18"/>
     <p:sldId id="348" r:id="rId19"/>
@@ -5030,6 +5030,447 @@
       </p:grpSpPr>
       <p:sp>
         <p:nvSpPr>
+          <p:cNvPr id="2" name="Rectangle 1">
+            <a:extLst>
+              <a:ext uri="{FF2B5EF4-FFF2-40B4-BE49-F238E27FC236}">
+                <a16:creationId xmlns:a16="http://schemas.microsoft.com/office/drawing/2014/main" id="{4083A82E-72E2-914E-92E2-18175FEB8BFD}"/>
+              </a:ext>
+            </a:extLst>
+          </p:cNvPr>
+          <p:cNvSpPr/>
+          <p:nvPr/>
+        </p:nvSpPr>
+        <p:spPr>
+          <a:xfrm>
+            <a:off x="460267" y="3068320"/>
+            <a:ext cx="11435245" cy="2031325"/>
+          </a:xfrm>
+          <a:prstGeom prst="rect">
+            <a:avLst/>
+          </a:prstGeom>
+          <a:ln>
+            <a:solidFill>
+              <a:schemeClr val="tx1"/>
+            </a:solidFill>
+          </a:ln>
+        </p:spPr>
+        <p:txBody>
+          <a:bodyPr wrap="square">
+            <a:spAutoFit/>
+          </a:bodyPr>
+          <a:lstStyle/>
+          <a:p>
+            <a:r>
+              <a:rPr lang="en-US" sz="2500" b="1" dirty="0">
+                <a:latin typeface="Courier New" panose="02070309020205020404" pitchFamily="49" charset="0"/>
+                <a:cs typeface="Courier New" panose="02070309020205020404" pitchFamily="49" charset="0"/>
+              </a:rPr>
+              <a:t>X = 'the dog jumped over the moon’</a:t>
+            </a:r>
+          </a:p>
+          <a:p>
+            <a:endParaRPr lang="en-US" sz="2500" b="1" dirty="0">
+              <a:latin typeface="Courier New" panose="02070309020205020404" pitchFamily="49" charset="0"/>
+              <a:cs typeface="Courier New" panose="02070309020205020404" pitchFamily="49" charset="0"/>
+            </a:endParaRPr>
+          </a:p>
+          <a:p>
+            <a:r>
+              <a:rPr lang="en-US" sz="2500" b="1" dirty="0" err="1">
+                <a:latin typeface="Courier New" panose="02070309020205020404" pitchFamily="49" charset="0"/>
+                <a:cs typeface="Courier New" panose="02070309020205020404" pitchFamily="49" charset="0"/>
+              </a:rPr>
+              <a:t>re.search</a:t>
+            </a:r>
+            <a:r>
+              <a:rPr lang="en-US" sz="2500" b="1" dirty="0">
+                <a:latin typeface="Courier New" panose="02070309020205020404" pitchFamily="49" charset="0"/>
+                <a:cs typeface="Courier New" panose="02070309020205020404" pitchFamily="49" charset="0"/>
+              </a:rPr>
+              <a:t>('(dog)\s(jumped)', X).group(1) </a:t>
+            </a:r>
+            <a:r>
+              <a:rPr lang="en-US" sz="2500" b="1" dirty="0">
+                <a:solidFill>
+                  <a:schemeClr val="tx1">
+                    <a:lumMod val="50000"/>
+                    <a:lumOff val="50000"/>
+                  </a:schemeClr>
+                </a:solidFill>
+                <a:latin typeface="Courier New" panose="02070309020205020404" pitchFamily="49" charset="0"/>
+                <a:cs typeface="Courier New" panose="02070309020205020404" pitchFamily="49" charset="0"/>
+              </a:rPr>
+              <a:t># returns dog</a:t>
+            </a:r>
+          </a:p>
+          <a:p>
+            <a:r>
+              <a:rPr lang="en-US" sz="2500" b="1" dirty="0" err="1">
+                <a:latin typeface="Courier New" panose="02070309020205020404" pitchFamily="49" charset="0"/>
+                <a:cs typeface="Courier New" panose="02070309020205020404" pitchFamily="49" charset="0"/>
+              </a:rPr>
+              <a:t>re.search</a:t>
+            </a:r>
+            <a:r>
+              <a:rPr lang="en-US" sz="2500" b="1" dirty="0">
+                <a:latin typeface="Courier New" panose="02070309020205020404" pitchFamily="49" charset="0"/>
+                <a:cs typeface="Courier New" panose="02070309020205020404" pitchFamily="49" charset="0"/>
+              </a:rPr>
+              <a:t>('(dog)\s(jumped)', X).group(2) </a:t>
+            </a:r>
+            <a:r>
+              <a:rPr lang="en-US" sz="2500" b="1" dirty="0">
+                <a:solidFill>
+                  <a:schemeClr val="tx1">
+                    <a:lumMod val="50000"/>
+                    <a:lumOff val="50000"/>
+                  </a:schemeClr>
+                </a:solidFill>
+                <a:latin typeface="Courier New" panose="02070309020205020404" pitchFamily="49" charset="0"/>
+                <a:cs typeface="Courier New" panose="02070309020205020404" pitchFamily="49" charset="0"/>
+              </a:rPr>
+              <a:t># returns jumped</a:t>
+            </a:r>
+          </a:p>
+          <a:p>
+            <a:endParaRPr lang="en-US" sz="2600" b="1" dirty="0">
+              <a:latin typeface="Courier New" panose="02070309020205020404" pitchFamily="49" charset="0"/>
+              <a:cs typeface="Courier New" panose="02070309020205020404" pitchFamily="49" charset="0"/>
+            </a:endParaRPr>
+          </a:p>
+        </p:txBody>
+      </p:sp>
+      <p:sp>
+        <p:nvSpPr>
+          <p:cNvPr id="3" name="TextBox 2">
+            <a:extLst>
+              <a:ext uri="{FF2B5EF4-FFF2-40B4-BE49-F238E27FC236}">
+                <a16:creationId xmlns:a16="http://schemas.microsoft.com/office/drawing/2014/main" id="{83AA738A-121B-9446-BC76-ACA0223DC19D}"/>
+              </a:ext>
+            </a:extLst>
+          </p:cNvPr>
+          <p:cNvSpPr txBox="1"/>
+          <p:nvPr/>
+        </p:nvSpPr>
+        <p:spPr>
+          <a:xfrm>
+            <a:off x="2547146" y="316413"/>
+            <a:ext cx="6649577" cy="600164"/>
+          </a:xfrm>
+          <a:prstGeom prst="rect">
+            <a:avLst/>
+          </a:prstGeom>
+          <a:noFill/>
+        </p:spPr>
+        <p:txBody>
+          <a:bodyPr wrap="none" rtlCol="0">
+            <a:spAutoFit/>
+          </a:bodyPr>
+          <a:lstStyle/>
+          <a:p>
+            <a:r>
+              <a:rPr lang="en-US" sz="3300" dirty="0">
+                <a:latin typeface="Helvetica Light" panose="020B0403020202020204" pitchFamily="34" charset="0"/>
+                <a:cs typeface="Courier New" panose="02070309020205020404" pitchFamily="49" charset="0"/>
+              </a:rPr>
+              <a:t>Storing matches (or parts of them)</a:t>
+            </a:r>
+            <a:endParaRPr lang="en-US" sz="3300" dirty="0">
+              <a:latin typeface="Helvetica Light" panose="020B0403020202020204" pitchFamily="34" charset="0"/>
+            </a:endParaRPr>
+          </a:p>
+        </p:txBody>
+      </p:sp>
+      <p:sp>
+        <p:nvSpPr>
+          <p:cNvPr id="4" name="TextBox 3">
+            <a:extLst>
+              <a:ext uri="{FF2B5EF4-FFF2-40B4-BE49-F238E27FC236}">
+                <a16:creationId xmlns:a16="http://schemas.microsoft.com/office/drawing/2014/main" id="{0EF72AE7-8F11-0A44-9A3D-5FB4152DFF6E}"/>
+              </a:ext>
+            </a:extLst>
+          </p:cNvPr>
+          <p:cNvSpPr txBox="1"/>
+          <p:nvPr/>
+        </p:nvSpPr>
+        <p:spPr>
+          <a:xfrm>
+            <a:off x="460267" y="1242925"/>
+            <a:ext cx="11222216" cy="954107"/>
+          </a:xfrm>
+          <a:prstGeom prst="rect">
+            <a:avLst/>
+          </a:prstGeom>
+          <a:noFill/>
+        </p:spPr>
+        <p:txBody>
+          <a:bodyPr wrap="square" rtlCol="0">
+            <a:spAutoFit/>
+          </a:bodyPr>
+          <a:lstStyle/>
+          <a:p>
+            <a:r>
+              <a:rPr lang="en-US" sz="2800" dirty="0">
+                <a:latin typeface="Helvetica Light" panose="020B0403020202020204" pitchFamily="34" charset="0"/>
+                <a:cs typeface="Courier New" panose="02070309020205020404" pitchFamily="49" charset="0"/>
+              </a:rPr>
+              <a:t>Parentheses () around an expression flag separates groups of stored matches. Storing matches can be done with </a:t>
+            </a:r>
+            <a:r>
+              <a:rPr lang="en-US" sz="2800" b="1" dirty="0" err="1">
+                <a:latin typeface="Courier New" panose="02070309020205020404" pitchFamily="49" charset="0"/>
+                <a:cs typeface="Courier New" panose="02070309020205020404" pitchFamily="49" charset="0"/>
+              </a:rPr>
+              <a:t>re.search</a:t>
+            </a:r>
+            <a:endParaRPr lang="en-US" sz="2800" b="1" dirty="0">
+              <a:latin typeface="Courier New" panose="02070309020205020404" pitchFamily="49" charset="0"/>
+              <a:cs typeface="Courier New" panose="02070309020205020404" pitchFamily="49" charset="0"/>
+            </a:endParaRPr>
+          </a:p>
+        </p:txBody>
+      </p:sp>
+      <p:cxnSp>
+        <p:nvCxnSpPr>
+          <p:cNvPr id="6" name="Straight Arrow Connector 5">
+            <a:extLst>
+              <a:ext uri="{FF2B5EF4-FFF2-40B4-BE49-F238E27FC236}">
+                <a16:creationId xmlns:a16="http://schemas.microsoft.com/office/drawing/2014/main" id="{E10EF72D-BAA9-9A4B-B035-A7BE2BECEB3F}"/>
+              </a:ext>
+            </a:extLst>
+          </p:cNvPr>
+          <p:cNvCxnSpPr>
+            <a:cxnSpLocks/>
+          </p:cNvCxnSpPr>
+          <p:nvPr/>
+        </p:nvCxnSpPr>
+        <p:spPr>
+          <a:xfrm flipH="1" flipV="1">
+            <a:off x="3050771" y="4680066"/>
+            <a:ext cx="415636" cy="814647"/>
+          </a:xfrm>
+          <a:prstGeom prst="straightConnector1">
+            <a:avLst/>
+          </a:prstGeom>
+          <a:ln w="25400">
+            <a:solidFill>
+              <a:schemeClr val="tx1">
+                <a:lumMod val="50000"/>
+                <a:lumOff val="50000"/>
+              </a:schemeClr>
+            </a:solidFill>
+            <a:tailEnd type="triangle"/>
+          </a:ln>
+        </p:spPr>
+        <p:style>
+          <a:lnRef idx="1">
+            <a:schemeClr val="accent1"/>
+          </a:lnRef>
+          <a:fillRef idx="0">
+            <a:schemeClr val="accent1"/>
+          </a:fillRef>
+          <a:effectRef idx="0">
+            <a:schemeClr val="accent1"/>
+          </a:effectRef>
+          <a:fontRef idx="minor">
+            <a:schemeClr val="tx1"/>
+          </a:fontRef>
+        </p:style>
+      </p:cxnSp>
+      <p:cxnSp>
+        <p:nvCxnSpPr>
+          <p:cNvPr id="8" name="Straight Arrow Connector 7">
+            <a:extLst>
+              <a:ext uri="{FF2B5EF4-FFF2-40B4-BE49-F238E27FC236}">
+                <a16:creationId xmlns:a16="http://schemas.microsoft.com/office/drawing/2014/main" id="{4E25FC8C-EBC2-EB47-92A0-F650B064B968}"/>
+              </a:ext>
+            </a:extLst>
+          </p:cNvPr>
+          <p:cNvCxnSpPr>
+            <a:cxnSpLocks/>
+          </p:cNvCxnSpPr>
+          <p:nvPr/>
+        </p:nvCxnSpPr>
+        <p:spPr>
+          <a:xfrm flipV="1">
+            <a:off x="4178237" y="4661734"/>
+            <a:ext cx="238592" cy="832979"/>
+          </a:xfrm>
+          <a:prstGeom prst="straightConnector1">
+            <a:avLst/>
+          </a:prstGeom>
+          <a:ln w="25400">
+            <a:solidFill>
+              <a:schemeClr val="tx1">
+                <a:lumMod val="50000"/>
+                <a:lumOff val="50000"/>
+              </a:schemeClr>
+            </a:solidFill>
+            <a:tailEnd type="triangle"/>
+          </a:ln>
+        </p:spPr>
+        <p:style>
+          <a:lnRef idx="1">
+            <a:schemeClr val="accent1"/>
+          </a:lnRef>
+          <a:fillRef idx="0">
+            <a:schemeClr val="accent1"/>
+          </a:fillRef>
+          <a:effectRef idx="0">
+            <a:schemeClr val="accent1"/>
+          </a:effectRef>
+          <a:fontRef idx="minor">
+            <a:schemeClr val="tx1"/>
+          </a:fontRef>
+        </p:style>
+      </p:cxnSp>
+      <p:sp>
+        <p:nvSpPr>
+          <p:cNvPr id="10" name="TextBox 9">
+            <a:extLst>
+              <a:ext uri="{FF2B5EF4-FFF2-40B4-BE49-F238E27FC236}">
+                <a16:creationId xmlns:a16="http://schemas.microsoft.com/office/drawing/2014/main" id="{E5501E96-3015-C24A-99F8-C9A6FDE87663}"/>
+              </a:ext>
+            </a:extLst>
+          </p:cNvPr>
+          <p:cNvSpPr txBox="1"/>
+          <p:nvPr/>
+        </p:nvSpPr>
+        <p:spPr>
+          <a:xfrm>
+            <a:off x="2030208" y="5655885"/>
+            <a:ext cx="4296058" cy="923330"/>
+          </a:xfrm>
+          <a:prstGeom prst="rect">
+            <a:avLst/>
+          </a:prstGeom>
+          <a:noFill/>
+        </p:spPr>
+        <p:txBody>
+          <a:bodyPr wrap="square" rtlCol="0">
+            <a:spAutoFit/>
+          </a:bodyPr>
+          <a:lstStyle/>
+          <a:p>
+            <a:r>
+              <a:rPr lang="en-US" dirty="0">
+                <a:latin typeface="Helvetica Light" panose="020B0403020202020204" pitchFamily="34" charset="0"/>
+              </a:rPr>
+              <a:t>Parentheses store matches as groups. .group(1) is the first .group(2) is the second here</a:t>
+            </a:r>
+          </a:p>
+        </p:txBody>
+      </p:sp>
+    </p:spTree>
+    <p:extLst>
+      <p:ext uri="{BB962C8B-B14F-4D97-AF65-F5344CB8AC3E}">
+        <p14:creationId xmlns:p14="http://schemas.microsoft.com/office/powerpoint/2010/main" val="2791349919"/>
+      </p:ext>
+    </p:extLst>
+  </p:cSld>
+  <p:clrMapOvr>
+    <a:masterClrMapping/>
+  </p:clrMapOvr>
+  <p:timing>
+    <p:tnLst>
+      <p:par>
+        <p:cTn id="1" dur="indefinite" restart="never" nodeType="tmRoot">
+          <p:childTnLst>
+            <p:seq concurrent="1" nextAc="seek">
+              <p:cTn id="2" dur="indefinite" nodeType="mainSeq">
+                <p:childTnLst>
+                  <p:par>
+                    <p:cTn id="3" fill="hold">
+                      <p:stCondLst>
+                        <p:cond delay="indefinite"/>
+                      </p:stCondLst>
+                      <p:childTnLst>
+                        <p:par>
+                          <p:cTn id="4" fill="hold">
+                            <p:stCondLst>
+                              <p:cond delay="0"/>
+                            </p:stCondLst>
+                            <p:childTnLst>
+                              <p:par>
+                                <p:cTn id="5" presetID="1" presetClass="entr" presetSubtype="0" fill="hold" grpId="0" nodeType="clickEffect">
+                                  <p:stCondLst>
+                                    <p:cond delay="0"/>
+                                  </p:stCondLst>
+                                  <p:childTnLst>
+                                    <p:set>
+                                      <p:cBhvr>
+                                        <p:cTn id="6" dur="1" fill="hold">
+                                          <p:stCondLst>
+                                            <p:cond delay="0"/>
+                                          </p:stCondLst>
+                                        </p:cTn>
+                                        <p:tgtEl>
+                                          <p:spTgt spid="2"/>
+                                        </p:tgtEl>
+                                        <p:attrNameLst>
+                                          <p:attrName>style.visibility</p:attrName>
+                                        </p:attrNameLst>
+                                      </p:cBhvr>
+                                      <p:to>
+                                        <p:strVal val="visible"/>
+                                      </p:to>
+                                    </p:set>
+                                  </p:childTnLst>
+                                </p:cTn>
+                              </p:par>
+                            </p:childTnLst>
+                          </p:cTn>
+                        </p:par>
+                      </p:childTnLst>
+                    </p:cTn>
+                  </p:par>
+                </p:childTnLst>
+              </p:cTn>
+              <p:prevCondLst>
+                <p:cond evt="onPrev" delay="0">
+                  <p:tgtEl>
+                    <p:sldTgt/>
+                  </p:tgtEl>
+                </p:cond>
+              </p:prevCondLst>
+              <p:nextCondLst>
+                <p:cond evt="onNext" delay="0">
+                  <p:tgtEl>
+                    <p:sldTgt/>
+                  </p:tgtEl>
+                </p:cond>
+              </p:nextCondLst>
+            </p:seq>
+          </p:childTnLst>
+        </p:cTn>
+      </p:par>
+    </p:tnLst>
+    <p:bldLst>
+      <p:bldP spid="2" grpId="0" animBg="1"/>
+    </p:bldLst>
+  </p:timing>
+</p:sld>
+</file>
+
+<file path=ppt/slides/slide13.xml><?xml version="1.0" encoding="utf-8"?>
+<p:sld xmlns:a="http://schemas.openxmlformats.org/drawingml/2006/main" xmlns:r="http://schemas.openxmlformats.org/officeDocument/2006/relationships" xmlns:p="http://schemas.openxmlformats.org/presentationml/2006/main">
+  <p:cSld>
+    <p:spTree>
+      <p:nvGrpSpPr>
+        <p:cNvPr id="1" name=""/>
+        <p:cNvGrpSpPr/>
+        <p:nvPr/>
+      </p:nvGrpSpPr>
+      <p:grpSpPr>
+        <a:xfrm>
+          <a:off x="0" y="0"/>
+          <a:ext cx="0" cy="0"/>
+          <a:chOff x="0" y="0"/>
+          <a:chExt cx="0" cy="0"/>
+        </a:xfrm>
+      </p:grpSpPr>
+      <p:sp>
+        <p:nvSpPr>
           <p:cNvPr id="3" name="TextBox 2">
             <a:extLst>
               <a:ext uri="{FF2B5EF4-FFF2-40B4-BE49-F238E27FC236}">
@@ -5144,7 +5585,7 @@
 </p:sld>
 </file>
 
-<file path=ppt/slides/slide13.xml><?xml version="1.0" encoding="utf-8"?>
+<file path=ppt/slides/slide14.xml><?xml version="1.0" encoding="utf-8"?>
 <p:sld xmlns:a="http://schemas.openxmlformats.org/drawingml/2006/main" xmlns:r="http://schemas.openxmlformats.org/officeDocument/2006/relationships" xmlns:p="http://schemas.openxmlformats.org/presentationml/2006/main">
   <p:cSld>
     <p:spTree>
@@ -5630,7 +6071,7 @@
 </p:sld>
 </file>
 
-<file path=ppt/slides/slide14.xml><?xml version="1.0" encoding="utf-8"?>
+<file path=ppt/slides/slide15.xml><?xml version="1.0" encoding="utf-8"?>
 <p:sld xmlns:a="http://schemas.openxmlformats.org/drawingml/2006/main" xmlns:r="http://schemas.openxmlformats.org/officeDocument/2006/relationships" xmlns:p="http://schemas.openxmlformats.org/presentationml/2006/main">
   <p:cSld>
     <p:spTree>
@@ -6098,447 +6539,6 @@
 </p:sld>
 </file>
 
-<file path=ppt/slides/slide15.xml><?xml version="1.0" encoding="utf-8"?>
-<p:sld xmlns:a="http://schemas.openxmlformats.org/drawingml/2006/main" xmlns:r="http://schemas.openxmlformats.org/officeDocument/2006/relationships" xmlns:p="http://schemas.openxmlformats.org/presentationml/2006/main">
-  <p:cSld>
-    <p:spTree>
-      <p:nvGrpSpPr>
-        <p:cNvPr id="1" name=""/>
-        <p:cNvGrpSpPr/>
-        <p:nvPr/>
-      </p:nvGrpSpPr>
-      <p:grpSpPr>
-        <a:xfrm>
-          <a:off x="0" y="0"/>
-          <a:ext cx="0" cy="0"/>
-          <a:chOff x="0" y="0"/>
-          <a:chExt cx="0" cy="0"/>
-        </a:xfrm>
-      </p:grpSpPr>
-      <p:sp>
-        <p:nvSpPr>
-          <p:cNvPr id="2" name="Rectangle 1">
-            <a:extLst>
-              <a:ext uri="{FF2B5EF4-FFF2-40B4-BE49-F238E27FC236}">
-                <a16:creationId xmlns:a16="http://schemas.microsoft.com/office/drawing/2014/main" id="{4083A82E-72E2-914E-92E2-18175FEB8BFD}"/>
-              </a:ext>
-            </a:extLst>
-          </p:cNvPr>
-          <p:cNvSpPr/>
-          <p:nvPr/>
-        </p:nvSpPr>
-        <p:spPr>
-          <a:xfrm>
-            <a:off x="460267" y="3068320"/>
-            <a:ext cx="11435245" cy="2031325"/>
-          </a:xfrm>
-          <a:prstGeom prst="rect">
-            <a:avLst/>
-          </a:prstGeom>
-          <a:ln>
-            <a:solidFill>
-              <a:schemeClr val="tx1"/>
-            </a:solidFill>
-          </a:ln>
-        </p:spPr>
-        <p:txBody>
-          <a:bodyPr wrap="square">
-            <a:spAutoFit/>
-          </a:bodyPr>
-          <a:lstStyle/>
-          <a:p>
-            <a:r>
-              <a:rPr lang="en-US" sz="2500" b="1" dirty="0">
-                <a:latin typeface="Courier New" panose="02070309020205020404" pitchFamily="49" charset="0"/>
-                <a:cs typeface="Courier New" panose="02070309020205020404" pitchFamily="49" charset="0"/>
-              </a:rPr>
-              <a:t>X = 'the dog jumped over the moon’</a:t>
-            </a:r>
-          </a:p>
-          <a:p>
-            <a:endParaRPr lang="en-US" sz="2500" b="1" dirty="0">
-              <a:latin typeface="Courier New" panose="02070309020205020404" pitchFamily="49" charset="0"/>
-              <a:cs typeface="Courier New" panose="02070309020205020404" pitchFamily="49" charset="0"/>
-            </a:endParaRPr>
-          </a:p>
-          <a:p>
-            <a:r>
-              <a:rPr lang="en-US" sz="2500" b="1" dirty="0" err="1">
-                <a:latin typeface="Courier New" panose="02070309020205020404" pitchFamily="49" charset="0"/>
-                <a:cs typeface="Courier New" panose="02070309020205020404" pitchFamily="49" charset="0"/>
-              </a:rPr>
-              <a:t>re.search</a:t>
-            </a:r>
-            <a:r>
-              <a:rPr lang="en-US" sz="2500" b="1" dirty="0">
-                <a:latin typeface="Courier New" panose="02070309020205020404" pitchFamily="49" charset="0"/>
-                <a:cs typeface="Courier New" panose="02070309020205020404" pitchFamily="49" charset="0"/>
-              </a:rPr>
-              <a:t>('(dog)\s(jumped)', X).group(1) </a:t>
-            </a:r>
-            <a:r>
-              <a:rPr lang="en-US" sz="2500" b="1" dirty="0">
-                <a:solidFill>
-                  <a:schemeClr val="tx1">
-                    <a:lumMod val="50000"/>
-                    <a:lumOff val="50000"/>
-                  </a:schemeClr>
-                </a:solidFill>
-                <a:latin typeface="Courier New" panose="02070309020205020404" pitchFamily="49" charset="0"/>
-                <a:cs typeface="Courier New" panose="02070309020205020404" pitchFamily="49" charset="0"/>
-              </a:rPr>
-              <a:t># returns dog</a:t>
-            </a:r>
-          </a:p>
-          <a:p>
-            <a:r>
-              <a:rPr lang="en-US" sz="2500" b="1" dirty="0" err="1">
-                <a:latin typeface="Courier New" panose="02070309020205020404" pitchFamily="49" charset="0"/>
-                <a:cs typeface="Courier New" panose="02070309020205020404" pitchFamily="49" charset="0"/>
-              </a:rPr>
-              <a:t>re.search</a:t>
-            </a:r>
-            <a:r>
-              <a:rPr lang="en-US" sz="2500" b="1" dirty="0">
-                <a:latin typeface="Courier New" panose="02070309020205020404" pitchFamily="49" charset="0"/>
-                <a:cs typeface="Courier New" panose="02070309020205020404" pitchFamily="49" charset="0"/>
-              </a:rPr>
-              <a:t>('(dog)\s(jumped)', X).group(2) </a:t>
-            </a:r>
-            <a:r>
-              <a:rPr lang="en-US" sz="2500" b="1" dirty="0">
-                <a:solidFill>
-                  <a:schemeClr val="tx1">
-                    <a:lumMod val="50000"/>
-                    <a:lumOff val="50000"/>
-                  </a:schemeClr>
-                </a:solidFill>
-                <a:latin typeface="Courier New" panose="02070309020205020404" pitchFamily="49" charset="0"/>
-                <a:cs typeface="Courier New" panose="02070309020205020404" pitchFamily="49" charset="0"/>
-              </a:rPr>
-              <a:t># returns jumped</a:t>
-            </a:r>
-          </a:p>
-          <a:p>
-            <a:endParaRPr lang="en-US" sz="2600" b="1" dirty="0">
-              <a:latin typeface="Courier New" panose="02070309020205020404" pitchFamily="49" charset="0"/>
-              <a:cs typeface="Courier New" panose="02070309020205020404" pitchFamily="49" charset="0"/>
-            </a:endParaRPr>
-          </a:p>
-        </p:txBody>
-      </p:sp>
-      <p:sp>
-        <p:nvSpPr>
-          <p:cNvPr id="3" name="TextBox 2">
-            <a:extLst>
-              <a:ext uri="{FF2B5EF4-FFF2-40B4-BE49-F238E27FC236}">
-                <a16:creationId xmlns:a16="http://schemas.microsoft.com/office/drawing/2014/main" id="{83AA738A-121B-9446-BC76-ACA0223DC19D}"/>
-              </a:ext>
-            </a:extLst>
-          </p:cNvPr>
-          <p:cNvSpPr txBox="1"/>
-          <p:nvPr/>
-        </p:nvSpPr>
-        <p:spPr>
-          <a:xfrm>
-            <a:off x="2547146" y="316413"/>
-            <a:ext cx="6649577" cy="600164"/>
-          </a:xfrm>
-          <a:prstGeom prst="rect">
-            <a:avLst/>
-          </a:prstGeom>
-          <a:noFill/>
-        </p:spPr>
-        <p:txBody>
-          <a:bodyPr wrap="none" rtlCol="0">
-            <a:spAutoFit/>
-          </a:bodyPr>
-          <a:lstStyle/>
-          <a:p>
-            <a:r>
-              <a:rPr lang="en-US" sz="3300" dirty="0">
-                <a:latin typeface="Helvetica Light" panose="020B0403020202020204" pitchFamily="34" charset="0"/>
-                <a:cs typeface="Courier New" panose="02070309020205020404" pitchFamily="49" charset="0"/>
-              </a:rPr>
-              <a:t>Storing matches (or parts of them)</a:t>
-            </a:r>
-            <a:endParaRPr lang="en-US" sz="3300" dirty="0">
-              <a:latin typeface="Helvetica Light" panose="020B0403020202020204" pitchFamily="34" charset="0"/>
-            </a:endParaRPr>
-          </a:p>
-        </p:txBody>
-      </p:sp>
-      <p:sp>
-        <p:nvSpPr>
-          <p:cNvPr id="4" name="TextBox 3">
-            <a:extLst>
-              <a:ext uri="{FF2B5EF4-FFF2-40B4-BE49-F238E27FC236}">
-                <a16:creationId xmlns:a16="http://schemas.microsoft.com/office/drawing/2014/main" id="{0EF72AE7-8F11-0A44-9A3D-5FB4152DFF6E}"/>
-              </a:ext>
-            </a:extLst>
-          </p:cNvPr>
-          <p:cNvSpPr txBox="1"/>
-          <p:nvPr/>
-        </p:nvSpPr>
-        <p:spPr>
-          <a:xfrm>
-            <a:off x="460267" y="1242925"/>
-            <a:ext cx="11222216" cy="954107"/>
-          </a:xfrm>
-          <a:prstGeom prst="rect">
-            <a:avLst/>
-          </a:prstGeom>
-          <a:noFill/>
-        </p:spPr>
-        <p:txBody>
-          <a:bodyPr wrap="square" rtlCol="0">
-            <a:spAutoFit/>
-          </a:bodyPr>
-          <a:lstStyle/>
-          <a:p>
-            <a:r>
-              <a:rPr lang="en-US" sz="2800" dirty="0">
-                <a:latin typeface="Helvetica Light" panose="020B0403020202020204" pitchFamily="34" charset="0"/>
-                <a:cs typeface="Courier New" panose="02070309020205020404" pitchFamily="49" charset="0"/>
-              </a:rPr>
-              <a:t>Parentheses () around an expression flag separates groups of stored matches. Storing matches can be done with </a:t>
-            </a:r>
-            <a:r>
-              <a:rPr lang="en-US" sz="2800" b="1" dirty="0" err="1">
-                <a:latin typeface="Courier New" panose="02070309020205020404" pitchFamily="49" charset="0"/>
-                <a:cs typeface="Courier New" panose="02070309020205020404" pitchFamily="49" charset="0"/>
-              </a:rPr>
-              <a:t>re.search</a:t>
-            </a:r>
-            <a:endParaRPr lang="en-US" sz="2800" b="1" dirty="0">
-              <a:latin typeface="Courier New" panose="02070309020205020404" pitchFamily="49" charset="0"/>
-              <a:cs typeface="Courier New" panose="02070309020205020404" pitchFamily="49" charset="0"/>
-            </a:endParaRPr>
-          </a:p>
-        </p:txBody>
-      </p:sp>
-      <p:cxnSp>
-        <p:nvCxnSpPr>
-          <p:cNvPr id="6" name="Straight Arrow Connector 5">
-            <a:extLst>
-              <a:ext uri="{FF2B5EF4-FFF2-40B4-BE49-F238E27FC236}">
-                <a16:creationId xmlns:a16="http://schemas.microsoft.com/office/drawing/2014/main" id="{E10EF72D-BAA9-9A4B-B035-A7BE2BECEB3F}"/>
-              </a:ext>
-            </a:extLst>
-          </p:cNvPr>
-          <p:cNvCxnSpPr>
-            <a:cxnSpLocks/>
-          </p:cNvCxnSpPr>
-          <p:nvPr/>
-        </p:nvCxnSpPr>
-        <p:spPr>
-          <a:xfrm flipH="1" flipV="1">
-            <a:off x="3050771" y="4680066"/>
-            <a:ext cx="415636" cy="814647"/>
-          </a:xfrm>
-          <a:prstGeom prst="straightConnector1">
-            <a:avLst/>
-          </a:prstGeom>
-          <a:ln w="25400">
-            <a:solidFill>
-              <a:schemeClr val="tx1">
-                <a:lumMod val="50000"/>
-                <a:lumOff val="50000"/>
-              </a:schemeClr>
-            </a:solidFill>
-            <a:tailEnd type="triangle"/>
-          </a:ln>
-        </p:spPr>
-        <p:style>
-          <a:lnRef idx="1">
-            <a:schemeClr val="accent1"/>
-          </a:lnRef>
-          <a:fillRef idx="0">
-            <a:schemeClr val="accent1"/>
-          </a:fillRef>
-          <a:effectRef idx="0">
-            <a:schemeClr val="accent1"/>
-          </a:effectRef>
-          <a:fontRef idx="minor">
-            <a:schemeClr val="tx1"/>
-          </a:fontRef>
-        </p:style>
-      </p:cxnSp>
-      <p:cxnSp>
-        <p:nvCxnSpPr>
-          <p:cNvPr id="8" name="Straight Arrow Connector 7">
-            <a:extLst>
-              <a:ext uri="{FF2B5EF4-FFF2-40B4-BE49-F238E27FC236}">
-                <a16:creationId xmlns:a16="http://schemas.microsoft.com/office/drawing/2014/main" id="{4E25FC8C-EBC2-EB47-92A0-F650B064B968}"/>
-              </a:ext>
-            </a:extLst>
-          </p:cNvPr>
-          <p:cNvCxnSpPr>
-            <a:cxnSpLocks/>
-          </p:cNvCxnSpPr>
-          <p:nvPr/>
-        </p:nvCxnSpPr>
-        <p:spPr>
-          <a:xfrm flipV="1">
-            <a:off x="4178237" y="4661734"/>
-            <a:ext cx="238592" cy="832979"/>
-          </a:xfrm>
-          <a:prstGeom prst="straightConnector1">
-            <a:avLst/>
-          </a:prstGeom>
-          <a:ln w="25400">
-            <a:solidFill>
-              <a:schemeClr val="tx1">
-                <a:lumMod val="50000"/>
-                <a:lumOff val="50000"/>
-              </a:schemeClr>
-            </a:solidFill>
-            <a:tailEnd type="triangle"/>
-          </a:ln>
-        </p:spPr>
-        <p:style>
-          <a:lnRef idx="1">
-            <a:schemeClr val="accent1"/>
-          </a:lnRef>
-          <a:fillRef idx="0">
-            <a:schemeClr val="accent1"/>
-          </a:fillRef>
-          <a:effectRef idx="0">
-            <a:schemeClr val="accent1"/>
-          </a:effectRef>
-          <a:fontRef idx="minor">
-            <a:schemeClr val="tx1"/>
-          </a:fontRef>
-        </p:style>
-      </p:cxnSp>
-      <p:sp>
-        <p:nvSpPr>
-          <p:cNvPr id="10" name="TextBox 9">
-            <a:extLst>
-              <a:ext uri="{FF2B5EF4-FFF2-40B4-BE49-F238E27FC236}">
-                <a16:creationId xmlns:a16="http://schemas.microsoft.com/office/drawing/2014/main" id="{E5501E96-3015-C24A-99F8-C9A6FDE87663}"/>
-              </a:ext>
-            </a:extLst>
-          </p:cNvPr>
-          <p:cNvSpPr txBox="1"/>
-          <p:nvPr/>
-        </p:nvSpPr>
-        <p:spPr>
-          <a:xfrm>
-            <a:off x="2030208" y="5655885"/>
-            <a:ext cx="4296058" cy="923330"/>
-          </a:xfrm>
-          <a:prstGeom prst="rect">
-            <a:avLst/>
-          </a:prstGeom>
-          <a:noFill/>
-        </p:spPr>
-        <p:txBody>
-          <a:bodyPr wrap="square" rtlCol="0">
-            <a:spAutoFit/>
-          </a:bodyPr>
-          <a:lstStyle/>
-          <a:p>
-            <a:r>
-              <a:rPr lang="en-US" dirty="0">
-                <a:latin typeface="Helvetica Light" panose="020B0403020202020204" pitchFamily="34" charset="0"/>
-              </a:rPr>
-              <a:t>Parentheses store matches as groups. .group(1) is the first .group(2) is the second here</a:t>
-            </a:r>
-          </a:p>
-        </p:txBody>
-      </p:sp>
-    </p:spTree>
-    <p:extLst>
-      <p:ext uri="{BB962C8B-B14F-4D97-AF65-F5344CB8AC3E}">
-        <p14:creationId xmlns:p14="http://schemas.microsoft.com/office/powerpoint/2010/main" val="8791290"/>
-      </p:ext>
-    </p:extLst>
-  </p:cSld>
-  <p:clrMapOvr>
-    <a:masterClrMapping/>
-  </p:clrMapOvr>
-  <p:timing>
-    <p:tnLst>
-      <p:par>
-        <p:cTn id="1" dur="indefinite" restart="never" nodeType="tmRoot">
-          <p:childTnLst>
-            <p:seq concurrent="1" nextAc="seek">
-              <p:cTn id="2" dur="indefinite" nodeType="mainSeq">
-                <p:childTnLst>
-                  <p:par>
-                    <p:cTn id="3" fill="hold">
-                      <p:stCondLst>
-                        <p:cond delay="indefinite"/>
-                      </p:stCondLst>
-                      <p:childTnLst>
-                        <p:par>
-                          <p:cTn id="4" fill="hold">
-                            <p:stCondLst>
-                              <p:cond delay="0"/>
-                            </p:stCondLst>
-                            <p:childTnLst>
-                              <p:par>
-                                <p:cTn id="5" presetID="1" presetClass="entr" presetSubtype="0" fill="hold" grpId="0" nodeType="clickEffect">
-                                  <p:stCondLst>
-                                    <p:cond delay="0"/>
-                                  </p:stCondLst>
-                                  <p:childTnLst>
-                                    <p:set>
-                                      <p:cBhvr>
-                                        <p:cTn id="6" dur="1" fill="hold">
-                                          <p:stCondLst>
-                                            <p:cond delay="0"/>
-                                          </p:stCondLst>
-                                        </p:cTn>
-                                        <p:tgtEl>
-                                          <p:spTgt spid="2"/>
-                                        </p:tgtEl>
-                                        <p:attrNameLst>
-                                          <p:attrName>style.visibility</p:attrName>
-                                        </p:attrNameLst>
-                                      </p:cBhvr>
-                                      <p:to>
-                                        <p:strVal val="visible"/>
-                                      </p:to>
-                                    </p:set>
-                                  </p:childTnLst>
-                                </p:cTn>
-                              </p:par>
-                            </p:childTnLst>
-                          </p:cTn>
-                        </p:par>
-                      </p:childTnLst>
-                    </p:cTn>
-                  </p:par>
-                </p:childTnLst>
-              </p:cTn>
-              <p:prevCondLst>
-                <p:cond evt="onPrev" delay="0">
-                  <p:tgtEl>
-                    <p:sldTgt/>
-                  </p:tgtEl>
-                </p:cond>
-              </p:prevCondLst>
-              <p:nextCondLst>
-                <p:cond evt="onNext" delay="0">
-                  <p:tgtEl>
-                    <p:sldTgt/>
-                  </p:tgtEl>
-                </p:cond>
-              </p:nextCondLst>
-            </p:seq>
-          </p:childTnLst>
-        </p:cTn>
-      </p:par>
-    </p:tnLst>
-    <p:bldLst>
-      <p:bldP spid="2" grpId="0" animBg="1"/>
-    </p:bldLst>
-  </p:timing>
-</p:sld>
-</file>
-
 <file path=ppt/slides/slide16.xml><?xml version="1.0" encoding="utf-8"?>
 <p:sld xmlns:a="http://schemas.openxmlformats.org/drawingml/2006/main" xmlns:r="http://schemas.openxmlformats.org/officeDocument/2006/relationships" xmlns:p="http://schemas.openxmlformats.org/presentationml/2006/main">
   <p:cSld>
@@ -7482,7 +7482,7 @@
         <p:spPr>
           <a:xfrm>
             <a:off x="460268" y="1125911"/>
-            <a:ext cx="11222216" cy="2185214"/>
+            <a:ext cx="11222216" cy="1754326"/>
           </a:xfrm>
           <a:prstGeom prst="rect">
             <a:avLst/>
@@ -7507,8 +7507,19 @@
                 <a:latin typeface="Helvetica Light" panose="020B0403020202020204" pitchFamily="34" charset="0"/>
                 <a:cs typeface="Courier New" panose="02070309020205020404" pitchFamily="49" charset="0"/>
               </a:rPr>
-              <a:t> finds all matches in a string, stores in a list. The length of the list gives you the number of matches</a:t>
-            </a:r>
+              <a:t> finds a match and replaces it </a:t>
+            </a:r>
+            <a:r>
+              <a:rPr lang="en-US" sz="2800">
+                <a:latin typeface="Helvetica Light" panose="020B0403020202020204" pitchFamily="34" charset="0"/>
+                <a:cs typeface="Courier New" panose="02070309020205020404" pitchFamily="49" charset="0"/>
+              </a:rPr>
+              <a:t>with something else.</a:t>
+            </a:r>
+            <a:endParaRPr lang="en-US" sz="2800" dirty="0">
+              <a:latin typeface="Helvetica Light" panose="020B0403020202020204" pitchFamily="34" charset="0"/>
+              <a:cs typeface="Courier New" panose="02070309020205020404" pitchFamily="49" charset="0"/>
+            </a:endParaRPr>
           </a:p>
           <a:p>
             <a:endParaRPr lang="en-US" sz="2800" dirty="0">
@@ -10622,27 +10633,7 @@
                 <a:latin typeface="Courier New" panose="02070309020205020404" pitchFamily="49" charset="0"/>
                 <a:cs typeface="Courier New" panose="02070309020205020404" pitchFamily="49" charset="0"/>
               </a:rPr>
-              <a:t>("^[ATCGN]", </a:t>
-            </a:r>
-            <a:r>
-              <a:rPr lang="en-US" sz="1900" b="1">
-                <a:latin typeface="Courier New" panose="02070309020205020404" pitchFamily="49" charset="0"/>
-                <a:cs typeface="Courier New" panose="02070309020205020404" pitchFamily="49" charset="0"/>
-              </a:rPr>
-              <a:t>Line):</a:t>
-            </a:r>
-            <a:r>
-              <a:rPr lang="en-US" sz="1900" b="1">
-                <a:solidFill>
-                  <a:schemeClr val="tx1">
-                    <a:lumMod val="50000"/>
-                    <a:lumOff val="50000"/>
-                  </a:schemeClr>
-                </a:solidFill>
-                <a:latin typeface="Courier New" panose="02070309020205020404" pitchFamily="49" charset="0"/>
-                <a:cs typeface="Courier New" panose="02070309020205020404" pitchFamily="49" charset="0"/>
-              </a:rPr>
-              <a:t># </a:t>
+              <a:t>("^[ATCGN]", Line):</a:t>
             </a:r>
             <a:r>
               <a:rPr lang="en-US" sz="1900" b="1" dirty="0">
@@ -10655,20 +10646,7 @@
                 <a:latin typeface="Courier New" panose="02070309020205020404" pitchFamily="49" charset="0"/>
                 <a:cs typeface="Courier New" panose="02070309020205020404" pitchFamily="49" charset="0"/>
               </a:rPr>
-              <a:t>matches </a:t>
-            </a:r>
-            <a:r>
-              <a:rPr lang="en-US" sz="1900" b="1">
-                <a:solidFill>
-                  <a:schemeClr val="tx1">
-                    <a:lumMod val="50000"/>
-                    <a:lumOff val="50000"/>
-                  </a:schemeClr>
-                </a:solidFill>
-                <a:latin typeface="Courier New" panose="02070309020205020404" pitchFamily="49" charset="0"/>
-                <a:cs typeface="Courier New" panose="02070309020205020404" pitchFamily="49" charset="0"/>
-              </a:rPr>
-              <a:t>if starts with A, T, C, G, or N</a:t>
+              <a:t># matches if starts with A, T, C, G, or N</a:t>
             </a:r>
             <a:endParaRPr lang="en-US" sz="1900" b="1" dirty="0">
               <a:latin typeface="Courier New" panose="02070309020205020404" pitchFamily="49" charset="0"/>
